--- a/decks/geog-tectonics/geog-tectonics_ch1_inside-the-earth.pptx
+++ b/decks/geog-tectonics/geog-tectonics_ch1_inside-the-earth.pptx
@@ -126,30 +126,30 @@
   <p:extLst>
     <p:ext uri="{521415D9-36F7-43E2-AB2F-B90AF26B5E84}">
       <p14:sectionLst xmlns:p14="http://schemas.microsoft.com/office/powerpoint/2010/main">
-        <p14:section name="Opening" id="{c0c29278-8a1b-3e44-c01e-a626f6981d9f}">
+        <p14:section name="Opening" id="{0bbca076-6e08-e359-a06f-761b5aadc574}">
           <p14:sldIdLst>
             <p14:sldId id="256"/>
           </p14:sldIdLst>
         </p14:section>
-        <p14:section name="Gate" id="{26ecafc9-8628-ee3e-a6fd-16ef49a427ff}">
+        <p14:section name="Gate" id="{3edb3a95-00cc-2e6a-3397-15135879e5a6}">
           <p14:sldIdLst>
             <p14:sldId id="257"/>
             <p14:sldId id="258"/>
           </p14:sldIdLst>
         </p14:section>
-        <p14:section name="Pre-teach" id="{d1a4b695-fdac-b775-3993-96ea9c45de81}">
+        <p14:section name="Pre-teach" id="{4895d0cc-45c5-af45-a9a2-3f6326b1eb5c}">
           <p14:sldIdLst>
             <p14:sldId id="259"/>
             <p14:sldId id="260"/>
           </p14:sldIdLst>
         </p14:section>
-        <p14:section name="Read-along" id="{8f24aa9e-d892-f95e-c8e3-e1f81c160e4e}">
+        <p14:section name="Read-along" id="{a70fb86c-c8f1-abdf-de9d-2619a769927c}">
           <p14:sldIdLst>
             <p14:sldId id="261"/>
             <p14:sldId id="262"/>
           </p14:sldIdLst>
         </p14:section>
-        <p14:section name="Teach" id="{2df03f15-838b-36ad-3633-20bc9c395fed}">
+        <p14:section name="Teach" id="{e4864a10-3e84-f6b6-47b0-681528f17253}">
           <p14:sldIdLst>
             <p14:sldId id="263"/>
             <p14:sldId id="264"/>
@@ -158,7 +158,7 @@
             <p14:sldId id="267"/>
           </p14:sldIdLst>
         </p14:section>
-        <p14:section name="Routes" id="{667fcc9c-4863-8a77-7bd9-3feec7a01cbb}">
+        <p14:section name="Routes" id="{498c2db5-3da4-257e-a9d4-c2a7faf0a7cd}">
           <p14:sldIdLst>
             <p14:sldId id="268"/>
             <p14:sldId id="269"/>
@@ -166,12 +166,12 @@
             <p14:sldId id="271"/>
           </p14:sldIdLst>
         </p14:section>
-        <p14:section name="Close" id="{1fa215c2-c66e-f34d-f569-f3ac95cdf635}">
+        <p14:section name="Close" id="{ea05a1a7-bf9b-0c85-ce23-12567384a994}">
           <p14:sldIdLst>
             <p14:sldId id="272"/>
           </p14:sldIdLst>
         </p14:section>
-        <p14:section name="Answers" id="{62936cee-5321-7e7a-020d-547955fbaa73}">
+        <p14:section name="Answers" id="{c0657c66-9b73-71b3-9b5e-a50b2f6c3bab}">
           <p14:sldIdLst>
             <p14:sldId id="273"/>
             <p14:sldId id="274"/>
@@ -1327,7 +1327,7 @@
               <a:rPr lang="en-US" dirty="0"/>
               <a:t>Exit ticket — individual, silent, on a slip or mini-whiteboard. Recall before help: no notes, no lanes, no hints. Collect before pupils leave.
 Question: Which layer of the Earth is the thin, solid outer layer that we live on?
-Answer: D   Crust. The crust is the thin outer layer of solid rock. The mantle and the two parts of the core lie underneath it.
+Answer: B   Crust. The crust is the thin outer layer of solid rock. The mantle and the two parts of the core lie underneath it.
 Source of this question: gate item 1 re-asked (options rotated) — this chapter has no third quick-check module.
 The ebook also holds task 3, "What moves the plates?", for homework or the next lesson's do now.
 Sort the slips: correct → ready to move on; incorrect → start next lesson in the pre-teach group, with the read-along and the Support lane. Same destination next time.</a:t>
@@ -1510,7 +1510,7 @@
             <a:r>
               <a:rPr lang="en-US" dirty="0"/>
               <a:t>Answers — task 2: Magma or lava?. Reveal the answer; pupils mark their own work in a different colour, then read the "why" together. Same destination for every lane, so one answer serves the whole class.
-Answer: A   Magma is melted rock underground; lava is melted rock that has reached the surface
+Answer: B   Magma is melted rock underground; lava is melted rock that has reached the surface
 Why: Magma and lava are the same melted rock. Underground it is magma; once it reaches the surface it is lava.
 Ask a Support pupil to explain one step, and a Stretch pupil to share their extension.</a:t>
             </a:r>
@@ -1601,7 +1601,7 @@
             <a:r>
               <a:rPr lang="en-US" dirty="0"/>
               <a:t>Do now — retrieval. Silent, no notes, no help: recall comes before any support. Give about four minutes.
-1. Which layer of the Earth is the thin, solid outer layer that we live on?  →  A   Crust
+1. Which layer of the Earth is the thin, solid outer layer that we live on?  →  C   Crust
 2. Melted rock that is still under the ground is called ___.  →  magma
 3. The Earth is about 4.54 billion years old. Write this age in millions of years.  →  4540 million years
 Circulate: who gets 3/3 (Stretch route), 2/3 (Core), 0–1 (Support)? Use this to route pupils later in the lesson.</a:t>
@@ -1693,7 +1693,7 @@
             <a:r>
               <a:rPr lang="en-US" dirty="0"/>
               <a:t>Answers — exit ticket: Exit ticket. Reveal the answer; pupils mark their own work in a different colour, then read the "why" together. Same destination for every lane, so one answer serves the whole class.
-Answer: D   Crust
+Answer: B   Crust
 Why: The crust is the thin outer layer of solid rock. The mantle and the two parts of the core lie underneath it.
 Ask a Support pupil to explain one step, and a Stretch pupil to share their extension.</a:t>
             </a:r>
@@ -1784,7 +1784,7 @@
             <a:r>
               <a:rPr lang="en-US" dirty="0"/>
               <a:t>Answers — pupils mark their own in a different colour, then hands up for 3/3, 2/3, 1/3.
-1. A   Crust. The crust is the thin outer layer of solid rock. The mantle and the two parts of the core lie underneath it.
+1. C   Crust. The crust is the thin outer layer of solid rock. The mantle and the two parts of the core lie underneath it.
 2. magma. Magma is melted rock underground. Once it comes out at the surface it is called lava.
 3. 4540 million years. One billion is one thousand million, so 4.54 billion is 4.54 × 1,000 = 4,540 million.
 Say the route each score points to: 3/3 Stretch, 2/3 Core, 0–1 Support. Pupils may choose to move up.</a:t>
@@ -7877,7 +7877,7 @@
                 <a:ea typeface="Calibri" pitchFamily="34" charset="-122"/>
                 <a:cs typeface="Calibri" pitchFamily="34" charset="-120"/>
               </a:rPr>
-              <a:t>Magma is melted rock underground; lava is melted rock that has reached the surface</a:t>
+              <a:t>Lava is the hot rock found in the Earth's core</a:t>
             </a:r>
             <a:endParaRPr lang="en-US" sz="2600" dirty="0"/>
           </a:p>
@@ -7914,7 +7914,7 @@
                 <a:ea typeface="Calibri" pitchFamily="34" charset="-122"/>
                 <a:cs typeface="Calibri" pitchFamily="34" charset="-120"/>
               </a:rPr>
-              <a:t>Lava is melted rock underground; magma is melted rock that has reached the surface</a:t>
+              <a:t>Magma is melted rock underground; lava is melted rock that has reached the surface</a:t>
             </a:r>
             <a:endParaRPr lang="en-US" sz="2600" dirty="0"/>
           </a:p>
@@ -7951,7 +7951,7 @@
                 <a:ea typeface="Calibri" pitchFamily="34" charset="-122"/>
                 <a:cs typeface="Calibri" pitchFamily="34" charset="-120"/>
               </a:rPr>
-              <a:t>Magma and lava are two names for the solid rock of the crust</a:t>
+              <a:t>Lava is melted rock underground; magma is melted rock that has reached the surface</a:t>
             </a:r>
             <a:endParaRPr lang="en-US" sz="2600" dirty="0"/>
           </a:p>
@@ -7988,7 +7988,7 @@
                 <a:ea typeface="Calibri" pitchFamily="34" charset="-122"/>
                 <a:cs typeface="Calibri" pitchFamily="34" charset="-120"/>
               </a:rPr>
-              <a:t>Lava is the hot rock found in the Earth's core</a:t>
+              <a:t>Magma and lava are two names for the solid rock of the crust</a:t>
             </a:r>
             <a:endParaRPr lang="en-US" sz="2600" dirty="0"/>
           </a:p>
@@ -9392,7 +9392,7 @@
                 <a:ea typeface="Calibri" pitchFamily="34" charset="-122"/>
                 <a:cs typeface="Calibri" pitchFamily="34" charset="-120"/>
               </a:rPr>
-              <a:t>Mantle</a:t>
+              <a:t>Outer core</a:t>
             </a:r>
             <a:endParaRPr lang="en-US" sz="2400" dirty="0"/>
           </a:p>
@@ -9429,7 +9429,7 @@
                 <a:ea typeface="Calibri" pitchFamily="34" charset="-122"/>
                 <a:cs typeface="Calibri" pitchFamily="34" charset="-120"/>
               </a:rPr>
-              <a:t>Outer core</a:t>
+              <a:t>Crust</a:t>
             </a:r>
             <a:endParaRPr lang="en-US" sz="2400" dirty="0"/>
           </a:p>
@@ -9466,7 +9466,7 @@
                 <a:ea typeface="Calibri" pitchFamily="34" charset="-122"/>
                 <a:cs typeface="Calibri" pitchFamily="34" charset="-120"/>
               </a:rPr>
-              <a:t>Inner core</a:t>
+              <a:t>Mantle</a:t>
             </a:r>
             <a:endParaRPr lang="en-US" sz="2400" dirty="0"/>
           </a:p>
@@ -9503,7 +9503,7 @@
                 <a:ea typeface="Calibri" pitchFamily="34" charset="-122"/>
                 <a:cs typeface="Calibri" pitchFamily="34" charset="-120"/>
               </a:rPr>
-              <a:t>Crust</a:t>
+              <a:t>Inner core</a:t>
             </a:r>
             <a:endParaRPr lang="en-US" sz="2400" dirty="0"/>
           </a:p>
@@ -10478,7 +10478,7 @@
                 <a:ea typeface="Cambria" pitchFamily="34" charset="-122"/>
                 <a:cs typeface="Cambria" pitchFamily="34" charset="-120"/>
               </a:rPr>
-              <a:t>A   Magma is melted rock underground; lava is melted rock that has reached the surface</a:t>
+              <a:t>B   Magma is melted rock underground; lava is melted rock that has reached the surface</a:t>
             </a:r>
             <a:endParaRPr lang="en-US" sz="1800" dirty="0"/>
           </a:p>
@@ -11012,7 +11012,7 @@
                 <a:ea typeface="Calibri" pitchFamily="34" charset="-122"/>
                 <a:cs typeface="Calibri" pitchFamily="34" charset="-120"/>
               </a:rPr>
-              <a:t>Crust</a:t>
+              <a:t>Inner core</a:t>
             </a:r>
             <a:endParaRPr lang="en-US" sz="2400" dirty="0"/>
           </a:p>
@@ -11049,7 +11049,7 @@
                 <a:ea typeface="Calibri" pitchFamily="34" charset="-122"/>
                 <a:cs typeface="Calibri" pitchFamily="34" charset="-120"/>
               </a:rPr>
-              <a:t>Mantle</a:t>
+              <a:t>Outer core</a:t>
             </a:r>
             <a:endParaRPr lang="en-US" sz="2400" dirty="0"/>
           </a:p>
@@ -11086,7 +11086,7 @@
                 <a:ea typeface="Calibri" pitchFamily="34" charset="-122"/>
                 <a:cs typeface="Calibri" pitchFamily="34" charset="-120"/>
               </a:rPr>
-              <a:t>Outer core</a:t>
+              <a:t>Crust</a:t>
             </a:r>
             <a:endParaRPr lang="en-US" sz="2400" dirty="0"/>
           </a:p>
@@ -11123,7 +11123,7 @@
                 <a:ea typeface="Calibri" pitchFamily="34" charset="-122"/>
                 <a:cs typeface="Calibri" pitchFamily="34" charset="-120"/>
               </a:rPr>
-              <a:t>Inner core</a:t>
+              <a:t>Mantle</a:t>
             </a:r>
             <a:endParaRPr lang="en-US" sz="2400" dirty="0"/>
           </a:p>
@@ -11858,7 +11858,7 @@
                 <a:ea typeface="Cambria" pitchFamily="34" charset="-122"/>
                 <a:cs typeface="Cambria" pitchFamily="34" charset="-120"/>
               </a:rPr>
-              <a:t>D   Crust</a:t>
+              <a:t>B   Crust</a:t>
             </a:r>
             <a:endParaRPr lang="en-US" sz="1800" dirty="0"/>
           </a:p>
@@ -12379,7 +12379,7 @@
                 <a:ea typeface="Calibri" pitchFamily="34" charset="-122"/>
                 <a:cs typeface="Calibri" pitchFamily="34" charset="-120"/>
               </a:rPr>
-              <a:t>A   Crust</a:t>
+              <a:t>C   Crust</a:t>
             </a:r>
             <a:endParaRPr lang="en-US" sz="2200" dirty="0"/>
           </a:p>

--- a/decks/geog-tectonics/geog-tectonics_ch1_inside-the-earth.pptx
+++ b/decks/geog-tectonics/geog-tectonics_ch1_inside-the-earth.pptx
@@ -126,30 +126,30 @@
   <p:extLst>
     <p:ext uri="{521415D9-36F7-43E2-AB2F-B90AF26B5E84}">
       <p14:sectionLst xmlns:p14="http://schemas.microsoft.com/office/powerpoint/2010/main">
-        <p14:section name="Opening" id="{0bbca076-6e08-e359-a06f-761b5aadc574}">
+        <p14:section name="Opening" id="{b3ac1963-e9c3-5f5d-9ff0-86f30aba2d63}">
           <p14:sldIdLst>
             <p14:sldId id="256"/>
           </p14:sldIdLst>
         </p14:section>
-        <p14:section name="Gate" id="{3edb3a95-00cc-2e6a-3397-15135879e5a6}">
+        <p14:section name="Gate" id="{d1e4b54f-308b-4ad2-eba4-a24c3fba6fa0}">
           <p14:sldIdLst>
             <p14:sldId id="257"/>
             <p14:sldId id="258"/>
           </p14:sldIdLst>
         </p14:section>
-        <p14:section name="Pre-teach" id="{4895d0cc-45c5-af45-a9a2-3f6326b1eb5c}">
+        <p14:section name="Pre-teach" id="{ce7aaa2a-9cb9-4a27-e3ef-bbda3aa4c99b}">
           <p14:sldIdLst>
             <p14:sldId id="259"/>
             <p14:sldId id="260"/>
           </p14:sldIdLst>
         </p14:section>
-        <p14:section name="Read-along" id="{a70fb86c-c8f1-abdf-de9d-2619a769927c}">
+        <p14:section name="Read-along" id="{44025eac-a941-354e-d2a2-0c718759bcc0}">
           <p14:sldIdLst>
             <p14:sldId id="261"/>
             <p14:sldId id="262"/>
           </p14:sldIdLst>
         </p14:section>
-        <p14:section name="Teach" id="{e4864a10-3e84-f6b6-47b0-681528f17253}">
+        <p14:section name="Teach" id="{b22138c5-9e39-bcb0-70fc-c45e1097a14d}">
           <p14:sldIdLst>
             <p14:sldId id="263"/>
             <p14:sldId id="264"/>
@@ -158,7 +158,7 @@
             <p14:sldId id="267"/>
           </p14:sldIdLst>
         </p14:section>
-        <p14:section name="Routes" id="{498c2db5-3da4-257e-a9d4-c2a7faf0a7cd}">
+        <p14:section name="Routes" id="{48bc5a35-e038-40e9-8dba-d49a48b998ca}">
           <p14:sldIdLst>
             <p14:sldId id="268"/>
             <p14:sldId id="269"/>
@@ -166,12 +166,12 @@
             <p14:sldId id="271"/>
           </p14:sldIdLst>
         </p14:section>
-        <p14:section name="Close" id="{ea05a1a7-bf9b-0c85-ce23-12567384a994}">
+        <p14:section name="Close" id="{1ab534ff-0454-addb-544f-13fc35c221c2}">
           <p14:sldIdLst>
             <p14:sldId id="272"/>
           </p14:sldIdLst>
         </p14:section>
-        <p14:section name="Answers" id="{c0657c66-9b73-71b3-9b5e-a50b2f6c3bab}">
+        <p14:section name="Answers" id="{ce1ee9e5-babe-0689-3c81-a79e928bceca}">
           <p14:sldIdLst>
             <p14:sldId id="273"/>
             <p14:sldId id="274"/>
